--- a/public/fun/pack/pptx/birthdaypro/돌잔치프리미엄_06_성장기록중심_민트플래티넘.pptx
+++ b/public/fun/pack/pptx/birthdaypro/돌잔치프리미엄_06_성장기록중심_민트플래티넘.pptx
@@ -112,12 +112,12 @@
   <p:extLst>
     <p:ext uri="{521415D9-36F7-43E2-AB2F-B90AF26B5E84}">
       <p14:sectionLst xmlns:p14="http://schemas.microsoft.com/office/powerpoint/2010/main">
-        <p14:section name="시작" id="{0D026EF6-53E8-4498-AB1F-84CCA3EF2179}">
+        <p14:section name="시작" id="{8A5063D8-96F0-4E7A-9834-54BC40B0A1DB}">
           <p14:sldIdLst>
             <p14:sldId id="256"/>
           </p14:sldIdLst>
         </p14:section>
-        <p14:section name="본문" id="{D603A8DA-496B-4D23-972E-42F87CB0CCB6}">
+        <p14:section name="본문" id="{71BE00E7-0EEE-4DD4-8216-06752644E2B7}">
           <p14:sldIdLst>
             <p14:sldId id="257"/>
             <p14:sldId id="258"/>
@@ -125,7 +125,7 @@
             <p14:sldId id="260"/>
           </p14:sldIdLst>
         </p14:section>
-        <p14:section name="마무리" id="{9045FC21-A9AB-496D-B805-65F0535C81B6}">
+        <p14:section name="마무리" id="{561FC769-A0D6-46C0-9B4E-A93A90A9DB02}">
           <p14:sldIdLst>
             <p14:sldId id="261"/>
           </p14:sldIdLst>
@@ -1629,7 +1629,7 @@
             </a:lvl1pPr>
           </a:lstStyle>
           <a:p>
-            <a:fld id="{296938F2-8AE9-4E72-BB5F-D5144AB7AECB}" type="slidenum">
+            <a:fld id="{A897489D-A501-483F-98E5-0915E1370A99}" type="slidenum">
               <a:rPr lang="en-US"/>
               <a:t>‹#›</a:t>
             </a:fld>
@@ -2308,7 +2308,7 @@
             </a:lvl1pPr>
           </a:lstStyle>
           <a:p>
-            <a:fld id="{49651F29-8096-465A-92CA-EF9F737E2B68}" type="slidenum">
+            <a:fld id="{C2DBEB28-13A7-4CB9-97FB-A03E1CE9BCAF}" type="slidenum">
               <a:rPr lang="en-US"/>
               <a:t>‹#›</a:t>
             </a:fld>
@@ -2986,7 +2986,7 @@
             </a:lvl1pPr>
           </a:lstStyle>
           <a:p>
-            <a:fld id="{2DA760D4-DBB6-4A7A-9C3A-67C5DBD11987}" type="slidenum">
+            <a:fld id="{F0F44CDA-5EF3-4801-9BD7-C9C5229D97A1}" type="slidenum">
               <a:rPr lang="en-US"/>
               <a:t>‹#›</a:t>
             </a:fld>
@@ -3827,7 +3827,7 @@
           <a:p>
             <a:r>
               <a:rPr lang="ko-KR"/>
-              <a:t>뒤집고, 기고, 일어서기까지 일 년이 걸렸습니다</a:t>
+              <a:t>뒤집고, 기고, 일어서기까지 하나씩 해냈습니다</a:t>
             </a:r>
           </a:p>
         </p:txBody>
@@ -3849,7 +3849,7 @@
           <a:p>
             <a:r>
               <a:rPr lang="ko-KR"/>
-              <a:t>아기 이름 · 0000. 00. 00</a:t>
+              <a:t>아기 이름 · 날짜 입력</a:t>
             </a:r>
           </a:p>
           <a:p>
@@ -4010,7 +4010,7 @@
           <a:bodyPr/>
           <a:lstStyle/>
           <a:p>
-            <a:fld id="{09D65EC4-0C9A-4412-8D1D-C10C1DBA7AF9}" type="slidenum">
+            <a:fld id="{FF7F6FB7-93D4-4A16-B5F0-F2259EB8FF75}" type="slidenum">
               <a:rPr lang="en-US"/>
               <a:t>‹#›</a:t>
             </a:fld>
@@ -4610,7 +4610,7 @@
           <a:bodyPr/>
           <a:lstStyle/>
           <a:p>
-            <a:fld id="{28526A08-9D54-4E02-9935-77EEC7AF2569}" type="slidenum">
+            <a:fld id="{241C2528-6B0C-4B53-BDFF-09575EA6D0DC}" type="slidenum">
               <a:rPr lang="en-US"/>
               <a:t>‹#›</a:t>
             </a:fld>
@@ -5630,7 +5630,7 @@
           <a:bodyPr/>
           <a:lstStyle/>
           <a:p>
-            <a:fld id="{22B1EB34-DDE5-4A0C-9A41-853624635F2F}" type="slidenum">
+            <a:fld id="{127BE863-CBFC-40C9-AD0C-963C8E4CE382}" type="slidenum">
               <a:rPr lang="en-US"/>
               <a:t>‹#›</a:t>
             </a:fld>
@@ -6305,7 +6305,7 @@
           <a:bodyPr/>
           <a:lstStyle/>
           <a:p>
-            <a:fld id="{2934D712-F528-4B85-8146-D4EF730EF6A6}" type="slidenum">
+            <a:fld id="{4D2445D5-C2D1-4377-AFA3-AC118D318EF6}" type="slidenum">
               <a:rPr lang="en-US"/>
               <a:t>‹#›</a:t>
             </a:fld>
